--- a/evals/runs/composer-2.5/T16-negative-series-pptx/deck.pptx
+++ b/evals/runs/composer-2.5/T16-negative-series-pptx/deck.pptx
@@ -622,8 +622,8 @@
       </c:valAx>
     </c:plotArea>
     <c:legend>
-      <c:legendPos/>
-      <c:overlay val="1"/>
+      <c:legendPos val="b"/>
+      <c:overlay val="0"/>
       <c:txPr>
         <a:bodyPr/>
         <a:lstStyle/>
